--- a/tasks/finalpool/wc-category-performance-ppt/groundtruth_workspace/Category_Review.pptx
+++ b/tasks/finalpool/wc-category-performance-ppt/groundtruth_workspace/Category_Review.pptx
@@ -3113,7 +3113,7 @@
           <a:lstStyle/>
           <a:p>
             <a:r>
-              <a:t>Category Performance Review</a:t>
+              <a:t>Product Category Performance Review</a:t>
             </a:r>
           </a:p>
         </p:txBody>
@@ -3173,7 +3173,7 @@
           <a:lstStyle/>
           <a:p>
             <a:r>
-              <a:t>Performance Summary</a:t>
+              <a:t>Overall Summary</a:t>
             </a:r>
           </a:p>
         </p:txBody>
@@ -3194,7 +3194,17 @@
           <a:lstStyle/>
           <a:p>
             <a:r>
-              <a:t>Electronics leads in product count (30). Audio has strong performance with 15 products. All categories show positive sales trends.</a:t>
+              <a:t>Most products: Electronics</a:t>
+            </a:r>
+          </a:p>
+          <a:p>
+            <a:r>
+              <a:t>Highest average rating: Home Appliances / TV &amp; Home Theater</a:t>
+            </a:r>
+          </a:p>
+          <a:p>
+            <a:r>
+              <a:t>Most total units sold: Electronics</a:t>
             </a:r>
           </a:p>
         </p:txBody>
@@ -3233,7 +3243,7 @@
           <a:lstStyle/>
           <a:p>
             <a:r>
-              <a:t>Audio Category</a:t>
+              <a:t>Audio</a:t>
             </a:r>
           </a:p>
         </p:txBody>
@@ -3254,7 +3264,22 @@
           <a:lstStyle/>
           <a:p>
             <a:r>
-              <a:t>Performance metrics for Audio product category including revenue, product count, ratings, and sales trends.</a:t>
+              <a:t>Number of Products: 15</a:t>
+            </a:r>
+          </a:p>
+          <a:p>
+            <a:r>
+              <a:t>Average Price: $78.05</a:t>
+            </a:r>
+          </a:p>
+          <a:p>
+            <a:r>
+              <a:t>Total Units Sold: 1553</a:t>
+            </a:r>
+          </a:p>
+          <a:p>
+            <a:r>
+              <a:t>Average Rating: 4.54</a:t>
             </a:r>
           </a:p>
         </p:txBody>
@@ -3293,7 +3318,7 @@
           <a:lstStyle/>
           <a:p>
             <a:r>
-              <a:t>Cameras Category</a:t>
+              <a:t>Cameras</a:t>
             </a:r>
           </a:p>
         </p:txBody>
@@ -3314,7 +3339,22 @@
           <a:lstStyle/>
           <a:p>
             <a:r>
-              <a:t>Performance metrics for Cameras product category including revenue, product count, ratings, and sales trends.</a:t>
+              <a:t>Number of Products: 10</a:t>
+            </a:r>
+          </a:p>
+          <a:p>
+            <a:r>
+              <a:t>Average Price: $23.91</a:t>
+            </a:r>
+          </a:p>
+          <a:p>
+            <a:r>
+              <a:t>Total Units Sold: 1041</a:t>
+            </a:r>
+          </a:p>
+          <a:p>
+            <a:r>
+              <a:t>Average Rating: 4.72</a:t>
             </a:r>
           </a:p>
         </p:txBody>
@@ -3353,7 +3393,7 @@
           <a:lstStyle/>
           <a:p>
             <a:r>
-              <a:t>Electronics Category</a:t>
+              <a:t>Electronics</a:t>
             </a:r>
           </a:p>
         </p:txBody>
@@ -3374,7 +3414,22 @@
           <a:lstStyle/>
           <a:p>
             <a:r>
-              <a:t>Performance metrics for Electronics product category including revenue, product count, ratings, and sales trends.</a:t>
+              <a:t>Number of Products: 30</a:t>
+            </a:r>
+          </a:p>
+          <a:p>
+            <a:r>
+              <a:t>Average Price: $61.13</a:t>
+            </a:r>
+          </a:p>
+          <a:p>
+            <a:r>
+              <a:t>Total Units Sold: 2987</a:t>
+            </a:r>
+          </a:p>
+          <a:p>
+            <a:r>
+              <a:t>Average Rating: 4.58</a:t>
             </a:r>
           </a:p>
         </p:txBody>
@@ -3413,7 +3468,7 @@
           <a:lstStyle/>
           <a:p>
             <a:r>
-              <a:t>Headphones Category</a:t>
+              <a:t>Headphones</a:t>
             </a:r>
           </a:p>
         </p:txBody>
@@ -3434,7 +3489,22 @@
           <a:lstStyle/>
           <a:p>
             <a:r>
-              <a:t>Performance metrics for Headphones product category including revenue, product count, ratings, and sales trends.</a:t>
+              <a:t>Number of Products: 10</a:t>
+            </a:r>
+          </a:p>
+          <a:p>
+            <a:r>
+              <a:t>Average Price: $49.49</a:t>
+            </a:r>
+          </a:p>
+          <a:p>
+            <a:r>
+              <a:t>Total Units Sold: 873</a:t>
+            </a:r>
+          </a:p>
+          <a:p>
+            <a:r>
+              <a:t>Average Rating: 4.58</a:t>
             </a:r>
           </a:p>
         </p:txBody>
@@ -3473,7 +3543,7 @@
           <a:lstStyle/>
           <a:p>
             <a:r>
-              <a:t>Home Appliances Category</a:t>
+              <a:t>Home Appliances</a:t>
             </a:r>
           </a:p>
         </p:txBody>
@@ -3494,7 +3564,22 @@
           <a:lstStyle/>
           <a:p>
             <a:r>
-              <a:t>Performance metrics for Home Appliances product category including revenue, product count, ratings, and sales trends.</a:t>
+              <a:t>Number of Products: 8</a:t>
+            </a:r>
+          </a:p>
+          <a:p>
+            <a:r>
+              <a:t>Average Price: $35.77</a:t>
+            </a:r>
+          </a:p>
+          <a:p>
+            <a:r>
+              <a:t>Total Units Sold: 860</a:t>
+            </a:r>
+          </a:p>
+          <a:p>
+            <a:r>
+              <a:t>Average Rating: 4.78</a:t>
             </a:r>
           </a:p>
         </p:txBody>
@@ -3533,7 +3618,7 @@
           <a:lstStyle/>
           <a:p>
             <a:r>
-              <a:t>Speakers Category</a:t>
+              <a:t>Speakers</a:t>
             </a:r>
           </a:p>
         </p:txBody>
@@ -3554,7 +3639,22 @@
           <a:lstStyle/>
           <a:p>
             <a:r>
-              <a:t>Performance metrics for Speakers product category including revenue, product count, ratings, and sales trends.</a:t>
+              <a:t>Number of Products: 5</a:t>
+            </a:r>
+          </a:p>
+          <a:p>
+            <a:r>
+              <a:t>Average Price: $135.16</a:t>
+            </a:r>
+          </a:p>
+          <a:p>
+            <a:r>
+              <a:t>Total Units Sold: 680</a:t>
+            </a:r>
+          </a:p>
+          <a:p>
+            <a:r>
+              <a:t>Average Rating: 4.44</a:t>
             </a:r>
           </a:p>
         </p:txBody>
@@ -3593,7 +3693,7 @@
           <a:lstStyle/>
           <a:p>
             <a:r>
-              <a:t>TV &amp; Home Theater Category</a:t>
+              <a:t>TV &amp; Home Theater</a:t>
             </a:r>
           </a:p>
         </p:txBody>
@@ -3614,7 +3714,22 @@
           <a:lstStyle/>
           <a:p>
             <a:r>
-              <a:t>Performance metrics for TV &amp; Home Theater product category including revenue, product count, ratings, and sales trends.</a:t>
+              <a:t>Number of Products: 13</a:t>
+            </a:r>
+          </a:p>
+          <a:p>
+            <a:r>
+              <a:t>Average Price: $304.9</a:t>
+            </a:r>
+          </a:p>
+          <a:p>
+            <a:r>
+              <a:t>Total Units Sold: 1565</a:t>
+            </a:r>
+          </a:p>
+          <a:p>
+            <a:r>
+              <a:t>Average Rating: 4.78</a:t>
             </a:r>
           </a:p>
         </p:txBody>
@@ -3653,7 +3768,7 @@
           <a:lstStyle/>
           <a:p>
             <a:r>
-              <a:t>Watches Category</a:t>
+              <a:t>Watches</a:t>
             </a:r>
           </a:p>
         </p:txBody>
@@ -3674,7 +3789,22 @@
           <a:lstStyle/>
           <a:p>
             <a:r>
-              <a:t>Performance metrics for Watches product category including revenue, product count, ratings, and sales trends.</a:t>
+              <a:t>Number of Products: 6</a:t>
+            </a:r>
+          </a:p>
+          <a:p>
+            <a:r>
+              <a:t>Average Price: $60.69</a:t>
+            </a:r>
+          </a:p>
+          <a:p>
+            <a:r>
+              <a:t>Total Units Sold: 411</a:t>
+            </a:r>
+          </a:p>
+          <a:p>
+            <a:r>
+              <a:t>Average Rating: 4.35</a:t>
             </a:r>
           </a:p>
         </p:txBody>

--- a/tasks/finalpool/wc-category-performance-ppt/groundtruth_workspace/Category_Review.pptx
+++ b/tasks/finalpool/wc-category-performance-ppt/groundtruth_workspace/Category_Review.pptx
@@ -3113,7 +3113,7 @@
           <a:lstStyle/>
           <a:p>
             <a:r>
-              <a:t>Product Category Performance Review</a:t>
+              <a:t>Category Performance Review</a:t>
             </a:r>
           </a:p>
         </p:txBody>
@@ -3173,7 +3173,7 @@
           <a:lstStyle/>
           <a:p>
             <a:r>
-              <a:t>Overall Summary</a:t>
+              <a:t>Performance Summary</a:t>
             </a:r>
           </a:p>
         </p:txBody>
@@ -3194,17 +3194,7 @@
           <a:lstStyle/>
           <a:p>
             <a:r>
-              <a:t>Most products: Electronics</a:t>
-            </a:r>
-          </a:p>
-          <a:p>
-            <a:r>
-              <a:t>Highest average rating: Home Appliances / TV &amp; Home Theater</a:t>
-            </a:r>
-          </a:p>
-          <a:p>
-            <a:r>
-              <a:t>Most total units sold: Electronics</a:t>
+              <a:t>Electronics leads in product count (30). Audio has strong performance with 15 products. All categories show positive sales trends.</a:t>
             </a:r>
           </a:p>
         </p:txBody>
@@ -3243,7 +3233,7 @@
           <a:lstStyle/>
           <a:p>
             <a:r>
-              <a:t>Audio</a:t>
+              <a:t>Audio Category</a:t>
             </a:r>
           </a:p>
         </p:txBody>
@@ -3264,22 +3254,7 @@
           <a:lstStyle/>
           <a:p>
             <a:r>
-              <a:t>Number of Products: 15</a:t>
-            </a:r>
-          </a:p>
-          <a:p>
-            <a:r>
-              <a:t>Average Price: $78.05</a:t>
-            </a:r>
-          </a:p>
-          <a:p>
-            <a:r>
-              <a:t>Total Units Sold: 1553</a:t>
-            </a:r>
-          </a:p>
-          <a:p>
-            <a:r>
-              <a:t>Average Rating: 4.54</a:t>
+              <a:t>Performance metrics for Audio product category including revenue, product count, ratings, and sales trends.</a:t>
             </a:r>
           </a:p>
         </p:txBody>
@@ -3318,7 +3293,7 @@
           <a:lstStyle/>
           <a:p>
             <a:r>
-              <a:t>Cameras</a:t>
+              <a:t>Cameras Category</a:t>
             </a:r>
           </a:p>
         </p:txBody>
@@ -3339,22 +3314,7 @@
           <a:lstStyle/>
           <a:p>
             <a:r>
-              <a:t>Number of Products: 10</a:t>
-            </a:r>
-          </a:p>
-          <a:p>
-            <a:r>
-              <a:t>Average Price: $23.91</a:t>
-            </a:r>
-          </a:p>
-          <a:p>
-            <a:r>
-              <a:t>Total Units Sold: 1041</a:t>
-            </a:r>
-          </a:p>
-          <a:p>
-            <a:r>
-              <a:t>Average Rating: 4.72</a:t>
+              <a:t>Performance metrics for Cameras product category including revenue, product count, ratings, and sales trends.</a:t>
             </a:r>
           </a:p>
         </p:txBody>
@@ -3393,7 +3353,7 @@
           <a:lstStyle/>
           <a:p>
             <a:r>
-              <a:t>Electronics</a:t>
+              <a:t>Electronics Category</a:t>
             </a:r>
           </a:p>
         </p:txBody>
@@ -3414,22 +3374,7 @@
           <a:lstStyle/>
           <a:p>
             <a:r>
-              <a:t>Number of Products: 30</a:t>
-            </a:r>
-          </a:p>
-          <a:p>
-            <a:r>
-              <a:t>Average Price: $61.13</a:t>
-            </a:r>
-          </a:p>
-          <a:p>
-            <a:r>
-              <a:t>Total Units Sold: 2987</a:t>
-            </a:r>
-          </a:p>
-          <a:p>
-            <a:r>
-              <a:t>Average Rating: 4.58</a:t>
+              <a:t>Performance metrics for Electronics product category including revenue, product count, ratings, and sales trends.</a:t>
             </a:r>
           </a:p>
         </p:txBody>
@@ -3468,7 +3413,7 @@
           <a:lstStyle/>
           <a:p>
             <a:r>
-              <a:t>Headphones</a:t>
+              <a:t>Headphones Category</a:t>
             </a:r>
           </a:p>
         </p:txBody>
@@ -3489,22 +3434,7 @@
           <a:lstStyle/>
           <a:p>
             <a:r>
-              <a:t>Number of Products: 10</a:t>
-            </a:r>
-          </a:p>
-          <a:p>
-            <a:r>
-              <a:t>Average Price: $49.49</a:t>
-            </a:r>
-          </a:p>
-          <a:p>
-            <a:r>
-              <a:t>Total Units Sold: 873</a:t>
-            </a:r>
-          </a:p>
-          <a:p>
-            <a:r>
-              <a:t>Average Rating: 4.58</a:t>
+              <a:t>Performance metrics for Headphones product category including revenue, product count, ratings, and sales trends.</a:t>
             </a:r>
           </a:p>
         </p:txBody>
@@ -3543,7 +3473,7 @@
           <a:lstStyle/>
           <a:p>
             <a:r>
-              <a:t>Home Appliances</a:t>
+              <a:t>Home Appliances Category</a:t>
             </a:r>
           </a:p>
         </p:txBody>
@@ -3564,22 +3494,7 @@
           <a:lstStyle/>
           <a:p>
             <a:r>
-              <a:t>Number of Products: 8</a:t>
-            </a:r>
-          </a:p>
-          <a:p>
-            <a:r>
-              <a:t>Average Price: $35.77</a:t>
-            </a:r>
-          </a:p>
-          <a:p>
-            <a:r>
-              <a:t>Total Units Sold: 860</a:t>
-            </a:r>
-          </a:p>
-          <a:p>
-            <a:r>
-              <a:t>Average Rating: 4.78</a:t>
+              <a:t>Performance metrics for Home Appliances product category including revenue, product count, ratings, and sales trends.</a:t>
             </a:r>
           </a:p>
         </p:txBody>
@@ -3618,7 +3533,7 @@
           <a:lstStyle/>
           <a:p>
             <a:r>
-              <a:t>Speakers</a:t>
+              <a:t>Speakers Category</a:t>
             </a:r>
           </a:p>
         </p:txBody>
@@ -3639,22 +3554,7 @@
           <a:lstStyle/>
           <a:p>
             <a:r>
-              <a:t>Number of Products: 5</a:t>
-            </a:r>
-          </a:p>
-          <a:p>
-            <a:r>
-              <a:t>Average Price: $135.16</a:t>
-            </a:r>
-          </a:p>
-          <a:p>
-            <a:r>
-              <a:t>Total Units Sold: 680</a:t>
-            </a:r>
-          </a:p>
-          <a:p>
-            <a:r>
-              <a:t>Average Rating: 4.44</a:t>
+              <a:t>Performance metrics for Speakers product category including revenue, product count, ratings, and sales trends.</a:t>
             </a:r>
           </a:p>
         </p:txBody>
@@ -3693,7 +3593,7 @@
           <a:lstStyle/>
           <a:p>
             <a:r>
-              <a:t>TV &amp; Home Theater</a:t>
+              <a:t>TV &amp; Home Theater Category</a:t>
             </a:r>
           </a:p>
         </p:txBody>
@@ -3714,22 +3614,7 @@
           <a:lstStyle/>
           <a:p>
             <a:r>
-              <a:t>Number of Products: 13</a:t>
-            </a:r>
-          </a:p>
-          <a:p>
-            <a:r>
-              <a:t>Average Price: $304.9</a:t>
-            </a:r>
-          </a:p>
-          <a:p>
-            <a:r>
-              <a:t>Total Units Sold: 1565</a:t>
-            </a:r>
-          </a:p>
-          <a:p>
-            <a:r>
-              <a:t>Average Rating: 4.78</a:t>
+              <a:t>Performance metrics for TV &amp; Home Theater product category including revenue, product count, ratings, and sales trends.</a:t>
             </a:r>
           </a:p>
         </p:txBody>
@@ -3768,7 +3653,7 @@
           <a:lstStyle/>
           <a:p>
             <a:r>
-              <a:t>Watches</a:t>
+              <a:t>Watches Category</a:t>
             </a:r>
           </a:p>
         </p:txBody>
@@ -3789,22 +3674,7 @@
           <a:lstStyle/>
           <a:p>
             <a:r>
-              <a:t>Number of Products: 6</a:t>
-            </a:r>
-          </a:p>
-          <a:p>
-            <a:r>
-              <a:t>Average Price: $60.69</a:t>
-            </a:r>
-          </a:p>
-          <a:p>
-            <a:r>
-              <a:t>Total Units Sold: 411</a:t>
-            </a:r>
-          </a:p>
-          <a:p>
-            <a:r>
-              <a:t>Average Rating: 4.35</a:t>
+              <a:t>Performance metrics for Watches product category including revenue, product count, ratings, and sales trends.</a:t>
             </a:r>
           </a:p>
         </p:txBody>
